--- a/sim2real_demo_ttc/paper_icra_v6/figures/all_figures.pptx
+++ b/sim2real_demo_ttc/paper_icra_v6/figures/all_figures.pptx
@@ -3336,7 +3336,7 @@
               <a:defRPr sz="1800" b="1"/>
             </a:pPr>
             <a:r>
-              <a:t>Fig. 1 alt  single-column vertical version (not used in the paper)</a:t>
+              <a:t>Fig. 1 alt  single-column vertical version (not used)</a:t>
             </a:r>
           </a:p>
         </p:txBody>
